--- a/docs/poster/variants/v29.pptx
+++ b/docs/poster/variants/v29.pptx
@@ -3569,6 +3569,90 @@
               </a:spcAft>
             </a:pPr>
             <a:r>
+              <a:rPr sz="6200" b="1">
+                <a:solidFill>
+                  <a:srgbClr val="8A4B1E"/>
+                </a:solidFill>
+                <a:latin typeface="Georgia"/>
+              </a:rPr>
+              <a:t>1,389</a:t>
+            </a:r>
+          </a:p>
+        </p:txBody>
+      </p:sp>
+      <p:sp>
+        <p:nvSpPr>
+          <p:cNvPr id="14" name="TextBox 13"/>
+          <p:cNvSpPr txBox="1"/>
+          <p:nvPr/>
+        </p:nvSpPr>
+        <p:spPr>
+          <a:xfrm>
+            <a:off x="731520" y="13906754"/>
+            <a:ext cx="10607040" cy="365760"/>
+          </a:xfrm>
+          <a:prstGeom prst="rect">
+            <a:avLst/>
+          </a:prstGeom>
+          <a:noFill/>
+        </p:spPr>
+        <p:txBody>
+          <a:bodyPr wrap="square" lIns="0" rIns="0" tIns="0" bIns="0">
+            <a:spAutoFit/>
+          </a:bodyPr>
+          <a:lstStyle/>
+          <a:p>
+            <a:pPr algn="l">
+              <a:lnSpc>
+                <a:spcPct val="122000"/>
+              </a:lnSpc>
+              <a:spcAft>
+                <a:spcPts val="600"/>
+              </a:spcAft>
+            </a:pPr>
+            <a:r>
+              <a:rPr sz="1500" b="0">
+                <a:solidFill>
+                  <a:srgbClr val="6E6759"/>
+                </a:solidFill>
+                <a:latin typeface="Arial"/>
+              </a:rPr>
+              <a:t>joystick commands through the platform</a:t>
+            </a:r>
+          </a:p>
+        </p:txBody>
+      </p:sp>
+      <p:sp>
+        <p:nvSpPr>
+          <p:cNvPr id="15" name="TextBox 14"/>
+          <p:cNvSpPr txBox="1"/>
+          <p:nvPr/>
+        </p:nvSpPr>
+        <p:spPr>
+          <a:xfrm>
+            <a:off x="731520" y="14361668"/>
+            <a:ext cx="10607040" cy="365760"/>
+          </a:xfrm>
+          <a:prstGeom prst="rect">
+            <a:avLst/>
+          </a:prstGeom>
+          <a:noFill/>
+        </p:spPr>
+        <p:txBody>
+          <a:bodyPr wrap="square" lIns="0" rIns="0" tIns="0" bIns="0">
+            <a:spAutoFit/>
+          </a:bodyPr>
+          <a:lstStyle/>
+          <a:p>
+            <a:pPr algn="l">
+              <a:lnSpc>
+                <a:spcPct val="95000"/>
+              </a:lnSpc>
+              <a:spcAft>
+                <a:spcPts val="0"/>
+              </a:spcAft>
+            </a:pPr>
+            <a:r>
               <a:rPr sz="3200" b="1">
                 <a:solidFill>
                   <a:srgbClr val="2B2A26"/>
@@ -3582,13 +3666,13 @@
       </p:sp>
       <p:sp>
         <p:nvSpPr>
-          <p:cNvPr id="14" name="Rectangle 13"/>
+          <p:cNvPr id="16" name="Rectangle 15"/>
           <p:cNvSpPr/>
           <p:nvPr/>
         </p:nvSpPr>
         <p:spPr>
           <a:xfrm>
-            <a:off x="731520" y="13631925"/>
+            <a:off x="731520" y="14889988"/>
             <a:ext cx="10607040" cy="27432"/>
           </a:xfrm>
           <a:prstGeom prst="rect">
@@ -3626,13 +3710,13 @@
       </p:sp>
       <p:sp>
         <p:nvSpPr>
-          <p:cNvPr id="15" name="TextBox 14"/>
+          <p:cNvPr id="17" name="TextBox 16"/>
           <p:cNvSpPr txBox="1"/>
           <p:nvPr/>
         </p:nvSpPr>
         <p:spPr>
           <a:xfrm>
-            <a:off x="731520" y="13961109"/>
+            <a:off x="731520" y="15219172"/>
             <a:ext cx="10607040" cy="365760"/>
           </a:xfrm>
           <a:prstGeom prst="rect">
@@ -3668,13 +3752,13 @@
       </p:sp>
       <p:sp>
         <p:nvSpPr>
-          <p:cNvPr id="16" name="TextBox 15"/>
+          <p:cNvPr id="18" name="TextBox 17"/>
           <p:cNvSpPr txBox="1"/>
           <p:nvPr/>
         </p:nvSpPr>
         <p:spPr>
           <a:xfrm>
-            <a:off x="731520" y="15627349"/>
+            <a:off x="731520" y="16885412"/>
             <a:ext cx="10607040" cy="365760"/>
           </a:xfrm>
           <a:prstGeom prst="rect">
@@ -3710,13 +3794,13 @@
       </p:sp>
       <p:sp>
         <p:nvSpPr>
-          <p:cNvPr id="17" name="Rectangle 16"/>
+          <p:cNvPr id="19" name="Rectangle 18"/>
           <p:cNvSpPr/>
           <p:nvPr/>
         </p:nvSpPr>
         <p:spPr>
           <a:xfrm>
-            <a:off x="731520" y="16155669"/>
+            <a:off x="731520" y="17413732"/>
             <a:ext cx="10607040" cy="27432"/>
           </a:xfrm>
           <a:prstGeom prst="rect">
@@ -3754,13 +3838,13 @@
       </p:sp>
       <p:sp>
         <p:nvSpPr>
-          <p:cNvPr id="18" name="TextBox 17"/>
+          <p:cNvPr id="20" name="TextBox 19"/>
           <p:cNvSpPr txBox="1"/>
           <p:nvPr/>
         </p:nvSpPr>
         <p:spPr>
           <a:xfrm>
-            <a:off x="731520" y="16484853"/>
+            <a:off x="731520" y="17742916"/>
             <a:ext cx="10607040" cy="365760"/>
           </a:xfrm>
           <a:prstGeom prst="rect">
@@ -3796,13 +3880,13 @@
       </p:sp>
       <p:sp>
         <p:nvSpPr>
-          <p:cNvPr id="19" name="TextBox 18"/>
+          <p:cNvPr id="21" name="TextBox 20"/>
           <p:cNvSpPr txBox="1"/>
           <p:nvPr/>
         </p:nvSpPr>
         <p:spPr>
           <a:xfrm>
-            <a:off x="731520" y="17856708"/>
+            <a:off x="731520" y="19114770"/>
             <a:ext cx="10607040" cy="365760"/>
           </a:xfrm>
           <a:prstGeom prst="rect">
@@ -3825,6 +3909,90 @@
               </a:spcAft>
             </a:pPr>
             <a:r>
+              <a:rPr sz="6200" b="1">
+                <a:solidFill>
+                  <a:srgbClr val="8A4B1E"/>
+                </a:solidFill>
+                <a:latin typeface="Georgia"/>
+              </a:rPr>
+              <a:t>92</a:t>
+            </a:r>
+          </a:p>
+        </p:txBody>
+      </p:sp>
+      <p:sp>
+        <p:nvSpPr>
+          <p:cNvPr id="22" name="TextBox 21"/>
+          <p:cNvSpPr txBox="1"/>
+          <p:nvPr/>
+        </p:nvSpPr>
+        <p:spPr>
+          <a:xfrm>
+            <a:off x="731520" y="19917918"/>
+            <a:ext cx="10607040" cy="365760"/>
+          </a:xfrm>
+          <a:prstGeom prst="rect">
+            <a:avLst/>
+          </a:prstGeom>
+          <a:noFill/>
+        </p:spPr>
+        <p:txBody>
+          <a:bodyPr wrap="square" lIns="0" rIns="0" tIns="0" bIns="0">
+            <a:spAutoFit/>
+          </a:bodyPr>
+          <a:lstStyle/>
+          <a:p>
+            <a:pPr algn="l">
+              <a:lnSpc>
+                <a:spcPct val="122000"/>
+              </a:lnSpc>
+              <a:spcAft>
+                <a:spcPts val="600"/>
+              </a:spcAft>
+            </a:pPr>
+            <a:r>
+              <a:rPr sz="1500" b="0">
+                <a:solidFill>
+                  <a:srgbClr val="6E6759"/>
+                </a:solidFill>
+                <a:latin typeface="Arial"/>
+              </a:rPr>
+              <a:t>questions asked of a dataset so far</a:t>
+            </a:r>
+          </a:p>
+        </p:txBody>
+      </p:sp>
+      <p:sp>
+        <p:nvSpPr>
+          <p:cNvPr id="23" name="TextBox 22"/>
+          <p:cNvSpPr txBox="1"/>
+          <p:nvPr/>
+        </p:nvSpPr>
+        <p:spPr>
+          <a:xfrm>
+            <a:off x="731520" y="20372832"/>
+            <a:ext cx="10607040" cy="365760"/>
+          </a:xfrm>
+          <a:prstGeom prst="rect">
+            <a:avLst/>
+          </a:prstGeom>
+          <a:noFill/>
+        </p:spPr>
+        <p:txBody>
+          <a:bodyPr wrap="square" lIns="0" rIns="0" tIns="0" bIns="0">
+            <a:spAutoFit/>
+          </a:bodyPr>
+          <a:lstStyle/>
+          <a:p>
+            <a:pPr algn="l">
+              <a:lnSpc>
+                <a:spcPct val="95000"/>
+              </a:lnSpc>
+              <a:spcAft>
+                <a:spcPts val="0"/>
+              </a:spcAft>
+            </a:pPr>
+            <a:r>
               <a:rPr sz="3200" b="1">
                 <a:solidFill>
                   <a:srgbClr val="2B2A26"/>
@@ -3838,13 +4006,13 @@
       </p:sp>
       <p:sp>
         <p:nvSpPr>
-          <p:cNvPr id="20" name="Rectangle 19"/>
+          <p:cNvPr id="24" name="Rectangle 23"/>
           <p:cNvSpPr/>
           <p:nvPr/>
         </p:nvSpPr>
         <p:spPr>
           <a:xfrm>
-            <a:off x="731520" y="18385028"/>
+            <a:off x="731520" y="20901152"/>
             <a:ext cx="10607040" cy="27432"/>
           </a:xfrm>
           <a:prstGeom prst="rect">
@@ -3882,13 +4050,13 @@
       </p:sp>
       <p:sp>
         <p:nvSpPr>
-          <p:cNvPr id="21" name="TextBox 20"/>
+          <p:cNvPr id="25" name="TextBox 24"/>
           <p:cNvSpPr txBox="1"/>
           <p:nvPr/>
         </p:nvSpPr>
         <p:spPr>
           <a:xfrm>
-            <a:off x="731520" y="18714212"/>
+            <a:off x="731520" y="21230336"/>
             <a:ext cx="10607040" cy="365760"/>
           </a:xfrm>
           <a:prstGeom prst="rect">
@@ -3924,13 +4092,13 @@
       </p:sp>
       <p:sp>
         <p:nvSpPr>
-          <p:cNvPr id="22" name="TextBox 21"/>
+          <p:cNvPr id="26" name="TextBox 25"/>
           <p:cNvSpPr txBox="1"/>
           <p:nvPr/>
         </p:nvSpPr>
         <p:spPr>
           <a:xfrm>
-            <a:off x="731520" y="20380452"/>
+            <a:off x="731520" y="22896576"/>
             <a:ext cx="10607040" cy="365760"/>
           </a:xfrm>
           <a:prstGeom prst="rect">
@@ -3966,13 +4134,13 @@
       </p:sp>
       <p:sp>
         <p:nvSpPr>
-          <p:cNvPr id="23" name="Rectangle 22"/>
+          <p:cNvPr id="27" name="Rectangle 26"/>
           <p:cNvSpPr/>
           <p:nvPr/>
         </p:nvSpPr>
         <p:spPr>
           <a:xfrm>
-            <a:off x="731520" y="20908772"/>
+            <a:off x="731520" y="23424896"/>
             <a:ext cx="10607040" cy="27432"/>
           </a:xfrm>
           <a:prstGeom prst="rect">
@@ -4010,13 +4178,13 @@
       </p:sp>
       <p:sp>
         <p:nvSpPr>
-          <p:cNvPr id="24" name="TextBox 23"/>
+          <p:cNvPr id="28" name="TextBox 27"/>
           <p:cNvSpPr txBox="1"/>
           <p:nvPr/>
         </p:nvSpPr>
         <p:spPr>
           <a:xfrm>
-            <a:off x="731520" y="21237956"/>
+            <a:off x="731520" y="23754080"/>
             <a:ext cx="10607040" cy="365760"/>
           </a:xfrm>
           <a:prstGeom prst="rect">
@@ -4052,13 +4220,13 @@
       </p:sp>
       <p:sp>
         <p:nvSpPr>
-          <p:cNvPr id="25" name="TextBox 24"/>
+          <p:cNvPr id="29" name="TextBox 28"/>
           <p:cNvSpPr txBox="1"/>
           <p:nvPr/>
         </p:nvSpPr>
         <p:spPr>
           <a:xfrm>
-            <a:off x="731520" y="22904196"/>
+            <a:off x="731520" y="25420320"/>
             <a:ext cx="10607040" cy="365760"/>
           </a:xfrm>
           <a:prstGeom prst="rect">
@@ -4094,13 +4262,13 @@
       </p:sp>
       <p:sp>
         <p:nvSpPr>
-          <p:cNvPr id="26" name="Rectangle 25"/>
+          <p:cNvPr id="30" name="Rectangle 29"/>
           <p:cNvSpPr/>
           <p:nvPr/>
         </p:nvSpPr>
         <p:spPr>
           <a:xfrm>
-            <a:off x="731520" y="23432516"/>
+            <a:off x="731520" y="25948640"/>
             <a:ext cx="10607040" cy="27432"/>
           </a:xfrm>
           <a:prstGeom prst="rect">
@@ -4138,13 +4306,13 @@
       </p:sp>
       <p:sp>
         <p:nvSpPr>
-          <p:cNvPr id="27" name="TextBox 26"/>
+          <p:cNvPr id="31" name="TextBox 30"/>
           <p:cNvSpPr txBox="1"/>
           <p:nvPr/>
         </p:nvSpPr>
         <p:spPr>
           <a:xfrm>
-            <a:off x="731520" y="23761700"/>
+            <a:off x="731520" y="26277824"/>
             <a:ext cx="10607040" cy="365760"/>
           </a:xfrm>
           <a:prstGeom prst="rect">
@@ -4173,20 +4341,20 @@
                 </a:solidFill>
                 <a:latin typeface="Arial"/>
               </a:rPr>
-              <a:t>A new robot needs a project, an API key and a session start. The ingest contract is the same for every vehicle: start a session, post sensor batches and frames while driving, stop. The platform does not care what the robot is. The Unitree humanoid's project exists on this basis and is waiting on its first upload.</a:t>
-            </a:r>
-          </a:p>
-        </p:txBody>
-      </p:sp>
-      <p:sp>
-        <p:nvSpPr>
-          <p:cNvPr id="28" name="TextBox 27"/>
+              <a:t>A new robot needs a project, an API key and a session start. The ingest contract is the same for every vehicle: open a session, post sensor batches and frames while driving, stop. The platform does not care what the robot is. Empty projects for a mobile robot and a humanoid already sit on it, waiting for a first upload.</a:t>
+            </a:r>
+          </a:p>
+        </p:txBody>
+      </p:sp>
+      <p:sp>
+        <p:nvSpPr>
+          <p:cNvPr id="32" name="TextBox 31"/>
           <p:cNvSpPr txBox="1"/>
           <p:nvPr/>
         </p:nvSpPr>
         <p:spPr>
           <a:xfrm>
-            <a:off x="731520" y="25427940"/>
+            <a:off x="731520" y="27944064"/>
             <a:ext cx="10607040" cy="365760"/>
           </a:xfrm>
           <a:prstGeom prst="rect">
@@ -4222,13 +4390,13 @@
       </p:sp>
       <p:sp>
         <p:nvSpPr>
-          <p:cNvPr id="29" name="Rectangle 28"/>
+          <p:cNvPr id="33" name="Rectangle 32"/>
           <p:cNvSpPr/>
           <p:nvPr/>
         </p:nvSpPr>
         <p:spPr>
           <a:xfrm>
-            <a:off x="731520" y="25956260"/>
+            <a:off x="731520" y="28472384"/>
             <a:ext cx="10607040" cy="27432"/>
           </a:xfrm>
           <a:prstGeom prst="rect">
@@ -4266,13 +4434,13 @@
       </p:sp>
       <p:sp>
         <p:nvSpPr>
-          <p:cNvPr id="30" name="TextBox 29"/>
+          <p:cNvPr id="34" name="TextBox 33"/>
           <p:cNvSpPr txBox="1"/>
           <p:nvPr/>
         </p:nvSpPr>
         <p:spPr>
           <a:xfrm>
-            <a:off x="731520" y="26285444"/>
+            <a:off x="731520" y="28801568"/>
             <a:ext cx="10607040" cy="365760"/>
           </a:xfrm>
           <a:prstGeom prst="rect">
@@ -4308,14 +4476,14 @@
       </p:sp>
       <p:sp>
         <p:nvSpPr>
-          <p:cNvPr id="31" name="TextBox 30"/>
+          <p:cNvPr id="35" name="TextBox 34"/>
           <p:cNvSpPr txBox="1"/>
           <p:nvPr/>
         </p:nvSpPr>
         <p:spPr>
           <a:xfrm>
-            <a:off x="731520" y="27657298"/>
-            <a:ext cx="10607040" cy="365760"/>
+            <a:off x="11704320" y="10285476"/>
+            <a:ext cx="20482560" cy="365760"/>
           </a:xfrm>
           <a:prstGeom prst="rect">
             <a:avLst/>
@@ -4343,21 +4511,21 @@
                 </a:solidFill>
                 <a:latin typeface="Georgia"/>
               </a:rPr>
-              <a:t>Every drive is diagnosed on arrival</a:t>
-            </a:r>
-          </a:p>
-        </p:txBody>
-      </p:sp>
-      <p:sp>
-        <p:nvSpPr>
-          <p:cNvPr id="32" name="Rectangle 31"/>
+              <a:t>Robots on the platform today</a:t>
+            </a:r>
+          </a:p>
+        </p:txBody>
+      </p:sp>
+      <p:sp>
+        <p:nvSpPr>
+          <p:cNvPr id="36" name="Rectangle 35"/>
           <p:cNvSpPr/>
           <p:nvPr/>
         </p:nvSpPr>
         <p:spPr>
           <a:xfrm>
-            <a:off x="731520" y="28185618"/>
-            <a:ext cx="10607040" cy="27432"/>
+            <a:off x="11704320" y="10813796"/>
+            <a:ext cx="20482560" cy="27432"/>
           </a:xfrm>
           <a:prstGeom prst="rect">
             <a:avLst/>
@@ -4394,14 +4562,14 @@
       </p:sp>
       <p:sp>
         <p:nvSpPr>
-          <p:cNvPr id="33" name="TextBox 32"/>
+          <p:cNvPr id="37" name="TextBox 36"/>
           <p:cNvSpPr txBox="1"/>
           <p:nvPr/>
         </p:nvSpPr>
         <p:spPr>
           <a:xfrm>
-            <a:off x="731520" y="28514802"/>
-            <a:ext cx="10607040" cy="365760"/>
+            <a:off x="11704320" y="11142979"/>
+            <a:ext cx="20482560" cy="365760"/>
           </a:xfrm>
           <a:prstGeom prst="rect">
             <a:avLst/>
@@ -4429,20 +4597,20 @@
                 </a:solidFill>
                 <a:latin typeface="Arial"/>
               </a:rPr>
-              <a:t>The platform runs a fixed diagnosis over each finished session without being asked: route, noise, cross-sensor correlation, a timeline. It has done that for 26 live robot sessions and written 45 charts. A person reads the diagnosis before deciding whether the drive is worth anything.</a:t>
-            </a:r>
-          </a:p>
-        </p:txBody>
-      </p:sp>
-      <p:sp>
-        <p:nvSpPr>
-          <p:cNvPr id="34" name="TextBox 33"/>
+              <a:t>Robot 241 is a tracked rover that drives crop rows and streams camera, GPS and two IMUs. The laser cart carries the weeder: a galvanometer laser, a down camera over the work zone and a forward camera. Ten projects sit on the platform and two of them have a robot reporting into them. Between those two vehicles, 2,686 frames in 26 drives.</a:t>
+            </a:r>
+          </a:p>
+        </p:txBody>
+      </p:sp>
+      <p:sp>
+        <p:nvSpPr>
+          <p:cNvPr id="38" name="TextBox 37"/>
           <p:cNvSpPr txBox="1"/>
           <p:nvPr/>
         </p:nvSpPr>
         <p:spPr>
           <a:xfrm>
-            <a:off x="11704320" y="10285476"/>
+            <a:off x="11704320" y="12220447"/>
             <a:ext cx="20482560" cy="365760"/>
           </a:xfrm>
           <a:prstGeom prst="rect">
@@ -4465,26 +4633,110 @@
               </a:spcAft>
             </a:pPr>
             <a:r>
-              <a:rPr sz="3200" b="1">
-                <a:solidFill>
-                  <a:srgbClr val="2B2A26"/>
+              <a:rPr sz="6200" b="1">
+                <a:solidFill>
+                  <a:srgbClr val="8A4B1E"/>
                 </a:solidFill>
                 <a:latin typeface="Georgia"/>
               </a:rPr>
-              <a:t>Robots on the platform today</a:t>
-            </a:r>
-          </a:p>
-        </p:txBody>
-      </p:sp>
-      <p:sp>
-        <p:nvSpPr>
-          <p:cNvPr id="35" name="Rectangle 34"/>
+              <a:t>14</a:t>
+            </a:r>
+          </a:p>
+        </p:txBody>
+      </p:sp>
+      <p:sp>
+        <p:nvSpPr>
+          <p:cNvPr id="39" name="TextBox 38"/>
+          <p:cNvSpPr txBox="1"/>
+          <p:nvPr/>
+        </p:nvSpPr>
+        <p:spPr>
+          <a:xfrm>
+            <a:off x="11704320" y="13023595"/>
+            <a:ext cx="20482560" cy="365760"/>
+          </a:xfrm>
+          <a:prstGeom prst="rect">
+            <a:avLst/>
+          </a:prstGeom>
+          <a:noFill/>
+        </p:spPr>
+        <p:txBody>
+          <a:bodyPr wrap="square" lIns="0" rIns="0" tIns="0" bIns="0">
+            <a:spAutoFit/>
+          </a:bodyPr>
+          <a:lstStyle/>
+          <a:p>
+            <a:pPr algn="l">
+              <a:lnSpc>
+                <a:spcPct val="122000"/>
+              </a:lnSpc>
+              <a:spcAft>
+                <a:spcPts val="600"/>
+              </a:spcAft>
+            </a:pPr>
+            <a:r>
+              <a:rPr sz="1500" b="0">
+                <a:solidFill>
+                  <a:srgbClr val="6E6759"/>
+                </a:solidFill>
+                <a:latin typeface="Arial"/>
+              </a:rPr>
+              <a:t>analysis tools the planner can choose from</a:t>
+            </a:r>
+          </a:p>
+        </p:txBody>
+      </p:sp>
+      <p:sp>
+        <p:nvSpPr>
+          <p:cNvPr id="40" name="TextBox 39"/>
+          <p:cNvSpPr txBox="1"/>
+          <p:nvPr/>
+        </p:nvSpPr>
+        <p:spPr>
+          <a:xfrm>
+            <a:off x="11704320" y="13478510"/>
+            <a:ext cx="20482560" cy="365760"/>
+          </a:xfrm>
+          <a:prstGeom prst="rect">
+            <a:avLst/>
+          </a:prstGeom>
+          <a:noFill/>
+        </p:spPr>
+        <p:txBody>
+          <a:bodyPr wrap="square" lIns="0" rIns="0" tIns="0" bIns="0">
+            <a:spAutoFit/>
+          </a:bodyPr>
+          <a:lstStyle/>
+          <a:p>
+            <a:pPr algn="l">
+              <a:lnSpc>
+                <a:spcPct val="95000"/>
+              </a:lnSpc>
+              <a:spcAft>
+                <a:spcPts val="0"/>
+              </a:spcAft>
+            </a:pPr>
+            <a:r>
+              <a:rPr sz="3200" b="1">
+                <a:solidFill>
+                  <a:srgbClr val="2B2A26"/>
+                </a:solidFill>
+                <a:latin typeface="Georgia"/>
+              </a:rPr>
+              <a:t>Ask a dataset what it is good for</a:t>
+            </a:r>
+          </a:p>
+        </p:txBody>
+      </p:sp>
+      <p:sp>
+        <p:nvSpPr>
+          <p:cNvPr id="41" name="Rectangle 40"/>
           <p:cNvSpPr/>
           <p:nvPr/>
         </p:nvSpPr>
         <p:spPr>
           <a:xfrm>
-            <a:off x="11704320" y="10813796"/>
+            <a:off x="11704320" y="14006830"/>
             <a:ext cx="20482560" cy="27432"/>
           </a:xfrm>
           <a:prstGeom prst="rect">
@@ -4522,13 +4774,13 @@
       </p:sp>
       <p:sp>
         <p:nvSpPr>
-          <p:cNvPr id="36" name="TextBox 35"/>
+          <p:cNvPr id="42" name="TextBox 41"/>
           <p:cNvSpPr txBox="1"/>
           <p:nvPr/>
         </p:nvSpPr>
         <p:spPr>
           <a:xfrm>
-            <a:off x="11704320" y="11142979"/>
+            <a:off x="11704320" y="14336013"/>
             <a:ext cx="20482560" cy="365760"/>
           </a:xfrm>
           <a:prstGeom prst="rect">
@@ -4557,20 +4809,20 @@
                 </a:solidFill>
                 <a:latin typeface="Arial"/>
               </a:rPr>
-              <a:t>Robot 241 is a tracked rover that drives crop rows and streams camera, GPS and two IMUs. The laser cart carries the weeder: a galvanometer laser, a down camera over the work zone and a forward camera. A Unitree humanoid has a project and has uploaded nothing yet. Between them the two ground vehicles have recorded 2,686 frames in 26 drives.</a:t>
-            </a:r>
-          </a:p>
-        </p:txBody>
-      </p:sp>
-      <p:sp>
-        <p:nvSpPr>
-          <p:cNvPr id="37" name="TextBox 36"/>
+              <a:t>Every dataset page carries a chat box. A user types or speaks a plain question about that dataset. A planner reads the question and the dataset's real column profile, then picks from 14 fixed analysis tools or writes new code. The answer comes back with the chart and the code that produced it.</a:t>
+            </a:r>
+          </a:p>
+        </p:txBody>
+      </p:sp>
+      <p:sp>
+        <p:nvSpPr>
+          <p:cNvPr id="43" name="TextBox 42"/>
           <p:cNvSpPr txBox="1"/>
           <p:nvPr/>
         </p:nvSpPr>
         <p:spPr>
           <a:xfrm>
-            <a:off x="11704320" y="12514833"/>
+            <a:off x="11704320" y="15413481"/>
             <a:ext cx="20482560" cy="365760"/>
           </a:xfrm>
           <a:prstGeom prst="rect">
@@ -4599,20 +4851,20 @@
                 </a:solidFill>
                 <a:latin typeface="Georgia"/>
               </a:rPr>
-              <a:t>Ask a dataset what it is good for</a:t>
-            </a:r>
-          </a:p>
-        </p:txBody>
-      </p:sp>
-      <p:sp>
-        <p:nvSpPr>
-          <p:cNvPr id="38" name="Rectangle 37"/>
+              <a:t>Left alone for fifteen rounds</a:t>
+            </a:r>
+          </a:p>
+        </p:txBody>
+      </p:sp>
+      <p:sp>
+        <p:nvSpPr>
+          <p:cNvPr id="44" name="Rectangle 43"/>
           <p:cNvSpPr/>
           <p:nvPr/>
         </p:nvSpPr>
         <p:spPr>
           <a:xfrm>
-            <a:off x="11704320" y="13043153"/>
+            <a:off x="11704320" y="15941802"/>
             <a:ext cx="20482560" cy="27432"/>
           </a:xfrm>
           <a:prstGeom prst="rect">
@@ -4648,15 +4900,81 @@
           </a:p>
         </p:txBody>
       </p:sp>
-      <p:sp>
-        <p:nvSpPr>
-          <p:cNvPr id="39" name="TextBox 38"/>
+      <p:pic>
+        <p:nvPicPr>
+          <p:cNvPr id="45" name="Picture 44" descr="f_rounds.png"/>
+          <p:cNvPicPr>
+            <a:picLocks noChangeAspect="1"/>
+          </p:cNvPicPr>
+          <p:nvPr/>
+        </p:nvPicPr>
+        <p:blipFill>
+          <a:blip r:embed="rId3"/>
+          <a:stretch>
+            <a:fillRect/>
+          </a:stretch>
+        </p:blipFill>
+        <p:spPr>
+          <a:xfrm>
+            <a:off x="11704320" y="16270985"/>
+            <a:ext cx="20482560" cy="4663440"/>
+          </a:xfrm>
+          <a:prstGeom prst="rect">
+            <a:avLst/>
+          </a:prstGeom>
+        </p:spPr>
+      </p:pic>
+      <p:sp>
+        <p:nvSpPr>
+          <p:cNvPr id="46" name="TextBox 45"/>
           <p:cNvSpPr txBox="1"/>
           <p:nvPr/>
         </p:nvSpPr>
         <p:spPr>
           <a:xfrm>
-            <a:off x="11704320" y="13372337"/>
+            <a:off x="11704320" y="21044153"/>
+            <a:ext cx="20482560" cy="365760"/>
+          </a:xfrm>
+          <a:prstGeom prst="rect">
+            <a:avLst/>
+          </a:prstGeom>
+          <a:noFill/>
+        </p:spPr>
+        <p:txBody>
+          <a:bodyPr wrap="square" lIns="0" rIns="0" tIns="0" bIns="0">
+            <a:spAutoFit/>
+          </a:bodyPr>
+          <a:lstStyle/>
+          <a:p>
+            <a:pPr algn="l">
+              <a:lnSpc>
+                <a:spcPct val="118000"/>
+              </a:lnSpc>
+              <a:spcAft>
+                <a:spcPts val="0"/>
+              </a:spcAft>
+            </a:pPr>
+            <a:r>
+              <a:rPr sz="1500" b="0">
+                <a:solidFill>
+                  <a:srgbClr val="6E6759"/>
+                </a:solidFill>
+                <a:latin typeface="Arial"/>
+              </a:rPr>
+              <a:t>Figure 3.  (f) Fifteen unattended rounds on a fixed holdout. (g) Round 15's exact dataset, three ways. The first two marks differ only in the starting weights, so their gap is the warm-start chain; the third is the recipe the campaign ran, whose wall-clock cap truncates the cosine, with its three seeds drawn behind it. Sigma throughout is that recipe's own seed spread, 0.0040 over three seeds, propagated to the difference being quoted. Completing the schedule is not the fix -- the second mark sits below the third.</a:t>
+            </a:r>
+          </a:p>
+        </p:txBody>
+      </p:sp>
+      <p:sp>
+        <p:nvSpPr>
+          <p:cNvPr id="47" name="TextBox 46"/>
+          <p:cNvSpPr txBox="1"/>
+          <p:nvPr/>
+        </p:nvSpPr>
+        <p:spPr>
+          <a:xfrm>
+            <a:off x="11704320" y="22029420"/>
             <a:ext cx="20482560" cy="365760"/>
           </a:xfrm>
           <a:prstGeom prst="rect">
@@ -4685,21 +5003,21 @@
                 </a:solidFill>
                 <a:latin typeface="Arial"/>
               </a:rPr>
-              <a:t>Every dataset page carries a chat box. A user types or speaks a plain question about that dataset. A planner reads the question and the dataset's real column profile, then picks from 14 fixed analysis tools or writes new code. The answer comes back with the chart and the code that produced it.</a:t>
-            </a:r>
-          </a:p>
-        </p:txBody>
-      </p:sp>
-      <p:sp>
-        <p:nvSpPr>
-          <p:cNvPr id="40" name="TextBox 39"/>
+              <a:t>Two cluster jobs, one collecting and one training, ran fifteen rounds against the locked registry with nobody in the room. Each round searched public sources, filtered what it found, merged, trained and evaluated. Every round reported success. Accuracy fell for fifteen rounds. This part is built and is switched off today.</a:t>
+            </a:r>
+          </a:p>
+        </p:txBody>
+      </p:sp>
+      <p:sp>
+        <p:nvSpPr>
+          <p:cNvPr id="48" name="TextBox 47"/>
           <p:cNvSpPr txBox="1"/>
           <p:nvPr/>
         </p:nvSpPr>
         <p:spPr>
           <a:xfrm>
-            <a:off x="11704320" y="14449805"/>
-            <a:ext cx="20482560" cy="365760"/>
+            <a:off x="32552640" y="10285476"/>
+            <a:ext cx="10607040" cy="365760"/>
           </a:xfrm>
           <a:prstGeom prst="rect">
             <a:avLst/>
@@ -4727,21 +5045,21 @@
                 </a:solidFill>
                 <a:latin typeface="Georgia"/>
               </a:rPr>
-              <a:t>Left alone for fifteen rounds</a:t>
-            </a:r>
-          </a:p>
-        </p:txBody>
-      </p:sp>
-      <p:sp>
-        <p:nvSpPr>
-          <p:cNvPr id="41" name="Rectangle 40"/>
+              <a:t>A drive becomes a dataset as it opens</a:t>
+            </a:r>
+          </a:p>
+        </p:txBody>
+      </p:sp>
+      <p:sp>
+        <p:nvSpPr>
+          <p:cNvPr id="49" name="Rectangle 48"/>
           <p:cNvSpPr/>
           <p:nvPr/>
         </p:nvSpPr>
         <p:spPr>
           <a:xfrm>
-            <a:off x="11704320" y="14978125"/>
-            <a:ext cx="20482560" cy="27432"/>
+            <a:off x="32552640" y="10813796"/>
+            <a:ext cx="10607040" cy="27432"/>
           </a:xfrm>
           <a:prstGeom prst="rect">
             <a:avLst/>
@@ -4776,82 +5094,16 @@
           </a:p>
         </p:txBody>
       </p:sp>
-      <p:pic>
-        <p:nvPicPr>
-          <p:cNvPr id="42" name="Picture 41" descr="f_rounds.png"/>
-          <p:cNvPicPr>
-            <a:picLocks noChangeAspect="1"/>
-          </p:cNvPicPr>
-          <p:nvPr/>
-        </p:nvPicPr>
-        <p:blipFill>
-          <a:blip r:embed="rId3"/>
-          <a:stretch>
-            <a:fillRect/>
-          </a:stretch>
-        </p:blipFill>
-        <p:spPr>
-          <a:xfrm>
-            <a:off x="11704320" y="15307309"/>
-            <a:ext cx="20482560" cy="4663440"/>
-          </a:xfrm>
-          <a:prstGeom prst="rect">
-            <a:avLst/>
-          </a:prstGeom>
-        </p:spPr>
-      </p:pic>
-      <p:sp>
-        <p:nvSpPr>
-          <p:cNvPr id="43" name="TextBox 42"/>
+      <p:sp>
+        <p:nvSpPr>
+          <p:cNvPr id="50" name="TextBox 49"/>
           <p:cNvSpPr txBox="1"/>
           <p:nvPr/>
         </p:nvSpPr>
         <p:spPr>
           <a:xfrm>
-            <a:off x="11704320" y="20080477"/>
-            <a:ext cx="20482560" cy="365760"/>
-          </a:xfrm>
-          <a:prstGeom prst="rect">
-            <a:avLst/>
-          </a:prstGeom>
-          <a:noFill/>
-        </p:spPr>
-        <p:txBody>
-          <a:bodyPr wrap="square" lIns="0" rIns="0" tIns="0" bIns="0">
-            <a:spAutoFit/>
-          </a:bodyPr>
-          <a:lstStyle/>
-          <a:p>
-            <a:pPr algn="l">
-              <a:lnSpc>
-                <a:spcPct val="118000"/>
-              </a:lnSpc>
-              <a:spcAft>
-                <a:spcPts val="0"/>
-              </a:spcAft>
-            </a:pPr>
-            <a:r>
-              <a:rPr sz="1500" b="0">
-                <a:solidFill>
-                  <a:srgbClr val="6E6759"/>
-                </a:solidFill>
-                <a:latin typeface="Arial"/>
-              </a:rPr>
-              <a:t>Figure 3.  (f) Fifteen unattended rounds on a fixed holdout. (g) Round 15's exact dataset, three ways. The first two marks differ only in the starting weights, so their gap is the warm-start chain; the third is the recipe the campaign ran, whose wall-clock cap truncates the cosine, with its three seeds drawn behind it. Sigma throughout is that recipe's own seed spread, 0.0040 over three seeds, propagated to the difference being quoted. Completing the schedule is not the fix -- the second mark sits below the third.</a:t>
-            </a:r>
-          </a:p>
-        </p:txBody>
-      </p:sp>
-      <p:sp>
-        <p:nvSpPr>
-          <p:cNvPr id="44" name="TextBox 43"/>
-          <p:cNvSpPr txBox="1"/>
-          <p:nvPr/>
-        </p:nvSpPr>
-        <p:spPr>
-          <a:xfrm>
-            <a:off x="11704320" y="21065743"/>
-            <a:ext cx="20482560" cy="365760"/>
+            <a:off x="32552640" y="11142979"/>
+            <a:ext cx="10607040" cy="365760"/>
           </a:xfrm>
           <a:prstGeom prst="rect">
             <a:avLst/>
@@ -4879,21 +5131,21 @@
                 </a:solidFill>
                 <a:latin typeface="Arial"/>
               </a:rPr>
-              <a:t>Two cluster jobs, one collecting and one training, ran fifteen rounds against the locked registry with nobody in the room. Each round searched public sources, filtered what it found, merged, trained and evaluated. Every round reported success. Accuracy fell for fifteen rounds. This part is built and is switched off today.</a:t>
-            </a:r>
-          </a:p>
-        </p:txBody>
-      </p:sp>
-      <p:sp>
-        <p:nvSpPr>
-          <p:cNvPr id="45" name="TextBox 44"/>
+              <a:t>A vehicle opens a session and the platform registers it as a governed dataset at that moment, not after the drive ends. Frames and sensor batches arrive over one API key. Robot 241 sends camera, GPS and two IMUs; the laser cart sends camera, laser state, vehicle telemetry and its own detections, and no position at all.</a:t>
+            </a:r>
+          </a:p>
+        </p:txBody>
+      </p:sp>
+      <p:sp>
+        <p:nvSpPr>
+          <p:cNvPr id="51" name="TextBox 50"/>
           <p:cNvSpPr txBox="1"/>
           <p:nvPr/>
         </p:nvSpPr>
         <p:spPr>
           <a:xfrm>
-            <a:off x="11704320" y="22143211"/>
-            <a:ext cx="20482560" cy="365760"/>
+            <a:off x="32552640" y="12809220"/>
+            <a:ext cx="10607040" cy="365760"/>
           </a:xfrm>
           <a:prstGeom prst="rect">
             <a:avLst/>
@@ -4921,21 +5173,21 @@
                 </a:solidFill>
                 <a:latin typeface="Georgia"/>
               </a:rPr>
-              <a:t>Everything we trained, ran, or rejected</a:t>
-            </a:r>
-          </a:p>
-        </p:txBody>
-      </p:sp>
-      <p:sp>
-        <p:nvSpPr>
-          <p:cNvPr id="46" name="Rectangle 45"/>
+              <a:t>Four frames, as recorded</a:t>
+            </a:r>
+          </a:p>
+        </p:txBody>
+      </p:sp>
+      <p:sp>
+        <p:nvSpPr>
+          <p:cNvPr id="52" name="Rectangle 51"/>
           <p:cNvSpPr/>
           <p:nvPr/>
         </p:nvSpPr>
         <p:spPr>
           <a:xfrm>
-            <a:off x="11704320" y="22671532"/>
-            <a:ext cx="20482560" cy="27432"/>
+            <a:off x="32552640" y="13337540"/>
+            <a:ext cx="10607040" cy="27432"/>
           </a:xfrm>
           <a:prstGeom prst="rect">
             <a:avLst/>
@@ -4972,7 +5224,7 @@
       </p:sp>
       <p:pic>
         <p:nvPicPr>
-          <p:cNvPr id="47" name="Picture 46" descr="m_ledger.png"/>
+          <p:cNvPr id="53" name="Picture 52" descr="l_robots.png"/>
           <p:cNvPicPr>
             <a:picLocks noChangeAspect="1"/>
           </p:cNvPicPr>
@@ -4986,8 +5238,8 @@
         </p:blipFill>
         <p:spPr>
           <a:xfrm>
-            <a:off x="11704320" y="23000715"/>
-            <a:ext cx="20482560" cy="3749040"/>
+            <a:off x="32552640" y="13666723"/>
+            <a:ext cx="10607040" cy="2377440"/>
           </a:xfrm>
           <a:prstGeom prst="rect">
             <a:avLst/>
@@ -4996,14 +5248,14 @@
       </p:pic>
       <p:sp>
         <p:nvSpPr>
-          <p:cNvPr id="48" name="TextBox 47"/>
+          <p:cNvPr id="54" name="TextBox 53"/>
           <p:cNvSpPr txBox="1"/>
           <p:nvPr/>
         </p:nvSpPr>
         <p:spPr>
           <a:xfrm>
-            <a:off x="11704320" y="26859484"/>
-            <a:ext cx="20482560" cy="365760"/>
+            <a:off x="32552640" y="16153892"/>
+            <a:ext cx="10607040" cy="365760"/>
           </a:xfrm>
           <a:prstGeom prst="rect">
             <a:avLst/>
@@ -5031,21 +5283,21 @@
                 </a:solidFill>
                 <a:latin typeface="Arial"/>
               </a:rPr>
-              <a:t>Figure 4.  30 rows in four families, which is 27 distinct models: OWLv2-large and Qwen2.5-7B each appear twice because each does two jobs here. One model is deployed. The zero-shot column is a single deterministic pass per model with no repeats, scored as mAP50 on the 848-image split; the reviewer column is the 149-case dev split, and two of its arms are still running. RF-DETR's score is on a third scale and is never differenced against the rows above it: the one measured offset between two of our evaluators, 0.0239, is larger than the gap on display.</a:t>
-            </a:r>
-          </a:p>
-        </p:txBody>
-      </p:sp>
-      <p:sp>
-        <p:nvSpPr>
-          <p:cNvPr id="49" name="TextBox 48"/>
+              <a:t>Figure 4.  Frames as recorded, unenhanced. Robot 241 has sent 2,238 frames at 640 x 360 and 1 Hz, the laser cart 427, and 75 of the cart's were taken in a field. None of the 2,686 is labelled. The rectangle in the down camera is the cart's fixed work-zone overlay. It is drawn on every frame, including the ones with no vegetation in them.</a:t>
+            </a:r>
+          </a:p>
+        </p:txBody>
+      </p:sp>
+      <p:sp>
+        <p:nvSpPr>
+          <p:cNvPr id="55" name="TextBox 54"/>
           <p:cNvSpPr txBox="1"/>
           <p:nvPr/>
         </p:nvSpPr>
         <p:spPr>
           <a:xfrm>
-            <a:off x="11704320" y="27844750"/>
-            <a:ext cx="20482560" cy="365760"/>
+            <a:off x="32552640" y="17363948"/>
+            <a:ext cx="10607040" cy="365760"/>
           </a:xfrm>
           <a:prstGeom prst="rect">
             <a:avLst/>
@@ -5073,20 +5325,20 @@
                 </a:solidFill>
                 <a:latin typeface="Arial"/>
               </a:rPr>
-              <a:t>Thirty rows in four families, which is 27 distinct models. Five detectors trained on our own holdout, two vision models inside the loop, fourteen vision-language models zero-shot, and nine language models as reviewers. One is deployed.</a:t>
-            </a:r>
-          </a:p>
-        </p:txBody>
-      </p:sp>
-      <p:sp>
-        <p:nvSpPr>
-          <p:cNvPr id="50" name="TextBox 49"/>
+              <a:t>Nothing here is enhanced and nothing is labelled. The rectangle in the cart's down camera is a fixed work-zone overlay: it sits at the same pixels on frames with no vegetation in them at all.</a:t>
+            </a:r>
+          </a:p>
+        </p:txBody>
+      </p:sp>
+      <p:sp>
+        <p:nvSpPr>
+          <p:cNvPr id="56" name="TextBox 55"/>
           <p:cNvSpPr txBox="1"/>
           <p:nvPr/>
         </p:nvSpPr>
         <p:spPr>
           <a:xfrm>
-            <a:off x="32552640" y="10285476"/>
+            <a:off x="32552640" y="18735802"/>
             <a:ext cx="10607040" cy="365760"/>
           </a:xfrm>
           <a:prstGeom prst="rect">
@@ -5115,20 +5367,20 @@
                 </a:solidFill>
                 <a:latin typeface="Georgia"/>
               </a:rPr>
-              <a:t>A drive becomes a dataset as it opens</a:t>
-            </a:r>
-          </a:p>
-        </p:txBody>
-      </p:sp>
-      <p:sp>
-        <p:nvSpPr>
-          <p:cNvPr id="51" name="Rectangle 50"/>
+              <a:t>Only one robot has the button</a:t>
+            </a:r>
+          </a:p>
+        </p:txBody>
+      </p:sp>
+      <p:sp>
+        <p:nvSpPr>
+          <p:cNvPr id="57" name="Rectangle 56"/>
           <p:cNvSpPr/>
           <p:nvPr/>
         </p:nvSpPr>
         <p:spPr>
           <a:xfrm>
-            <a:off x="32552640" y="10813796"/>
+            <a:off x="32552640" y="19264122"/>
             <a:ext cx="10607040" cy="27432"/>
           </a:xfrm>
           <a:prstGeom prst="rect">
@@ -5166,13 +5418,13 @@
       </p:sp>
       <p:sp>
         <p:nvSpPr>
-          <p:cNvPr id="52" name="TextBox 51"/>
+          <p:cNvPr id="58" name="TextBox 57"/>
           <p:cNvSpPr txBox="1"/>
           <p:nvPr/>
         </p:nvSpPr>
         <p:spPr>
           <a:xfrm>
-            <a:off x="32552640" y="11142979"/>
+            <a:off x="32552640" y="19593306"/>
             <a:ext cx="10607040" cy="365760"/>
           </a:xfrm>
           <a:prstGeom prst="rect">
@@ -5201,20 +5453,20 @@
                 </a:solidFill>
                 <a:latin typeface="Arial"/>
               </a:rPr>
-              <a:t>A vehicle opens a session and the platform registers it as a governed dataset at that moment, not after the drive ends. Frames and sensor batches arrive over one API key. Robot 241 sends camera, GPS and two IMUs; the laser cart sends camera, laser state, vehicle telemetry and its own detections, and no position at all.</a:t>
-            </a:r>
-          </a:p>
-        </p:txBody>
-      </p:sp>
-      <p:sp>
-        <p:nvSpPr>
-          <p:cNvPr id="53" name="TextBox 52"/>
+              <a:t>The Drive button appears on the 241 project and not on the laser cart's, because the allow-list holds one target. The rover has been dark since 2026-08-28: the platform answers a drive request today with its own offline page. The cart has never been drivable from the platform.</a:t>
+            </a:r>
+          </a:p>
+        </p:txBody>
+      </p:sp>
+      <p:sp>
+        <p:nvSpPr>
+          <p:cNvPr id="59" name="TextBox 58"/>
           <p:cNvSpPr txBox="1"/>
           <p:nvPr/>
         </p:nvSpPr>
         <p:spPr>
           <a:xfrm>
-            <a:off x="32552640" y="12809220"/>
+            <a:off x="32552640" y="21259546"/>
             <a:ext cx="10607040" cy="365760"/>
           </a:xfrm>
           <a:prstGeom prst="rect">
@@ -5243,20 +5495,20 @@
                 </a:solidFill>
                 <a:latin typeface="Georgia"/>
               </a:rPr>
-              <a:t>Four frames, as recorded</a:t>
-            </a:r>
-          </a:p>
-        </p:txBody>
-      </p:sp>
-      <p:sp>
-        <p:nvSpPr>
-          <p:cNvPr id="54" name="Rectangle 53"/>
+              <a:t>Which decisions a model makes</a:t>
+            </a:r>
+          </a:p>
+        </p:txBody>
+      </p:sp>
+      <p:sp>
+        <p:nvSpPr>
+          <p:cNvPr id="60" name="Rectangle 59"/>
           <p:cNvSpPr/>
           <p:nvPr/>
         </p:nvSpPr>
         <p:spPr>
           <a:xfrm>
-            <a:off x="32552640" y="13337540"/>
+            <a:off x="32552640" y="21787866"/>
             <a:ext cx="10607040" cy="27432"/>
           </a:xfrm>
           <a:prstGeom prst="rect">
@@ -5292,81 +5544,15 @@
           </a:p>
         </p:txBody>
       </p:sp>
-      <p:pic>
-        <p:nvPicPr>
-          <p:cNvPr id="55" name="Picture 54" descr="l_robots.png"/>
-          <p:cNvPicPr>
-            <a:picLocks noChangeAspect="1"/>
-          </p:cNvPicPr>
-          <p:nvPr/>
-        </p:nvPicPr>
-        <p:blipFill>
-          <a:blip r:embed="rId5"/>
-          <a:stretch>
-            <a:fillRect/>
-          </a:stretch>
-        </p:blipFill>
-        <p:spPr>
-          <a:xfrm>
-            <a:off x="32552640" y="13666723"/>
-            <a:ext cx="10607040" cy="2377440"/>
-          </a:xfrm>
-          <a:prstGeom prst="rect">
-            <a:avLst/>
-          </a:prstGeom>
-        </p:spPr>
-      </p:pic>
-      <p:sp>
-        <p:nvSpPr>
-          <p:cNvPr id="56" name="TextBox 55"/>
+      <p:sp>
+        <p:nvSpPr>
+          <p:cNvPr id="61" name="TextBox 60"/>
           <p:cNvSpPr txBox="1"/>
           <p:nvPr/>
         </p:nvSpPr>
         <p:spPr>
           <a:xfrm>
-            <a:off x="32552640" y="16153892"/>
-            <a:ext cx="10607040" cy="365760"/>
-          </a:xfrm>
-          <a:prstGeom prst="rect">
-            <a:avLst/>
-          </a:prstGeom>
-          <a:noFill/>
-        </p:spPr>
-        <p:txBody>
-          <a:bodyPr wrap="square" lIns="0" rIns="0" tIns="0" bIns="0">
-            <a:spAutoFit/>
-          </a:bodyPr>
-          <a:lstStyle/>
-          <a:p>
-            <a:pPr algn="l">
-              <a:lnSpc>
-                <a:spcPct val="118000"/>
-              </a:lnSpc>
-              <a:spcAft>
-                <a:spcPts val="0"/>
-              </a:spcAft>
-            </a:pPr>
-            <a:r>
-              <a:rPr sz="1500" b="0">
-                <a:solidFill>
-                  <a:srgbClr val="6E6759"/>
-                </a:solidFill>
-                <a:latin typeface="Arial"/>
-              </a:rPr>
-              <a:t>Figure 5.  Frames as recorded, unenhanced. Robot 241 has sent 2,238 frames at 640 x 360 and 1 Hz, the laser cart 427, and 75 of the cart's were taken in a field. None of the 2,686 is labelled. The rectangle in the down camera is the cart's fixed work-zone overlay. It is drawn on every frame, including the ones with no vegetation in them.</a:t>
-            </a:r>
-          </a:p>
-        </p:txBody>
-      </p:sp>
-      <p:sp>
-        <p:nvSpPr>
-          <p:cNvPr id="57" name="TextBox 56"/>
-          <p:cNvSpPr txBox="1"/>
-          <p:nvPr/>
-        </p:nvSpPr>
-        <p:spPr>
-          <a:xfrm>
-            <a:off x="32552640" y="17363948"/>
+            <a:off x="32552640" y="22117050"/>
             <a:ext cx="10607040" cy="365760"/>
           </a:xfrm>
           <a:prstGeom prst="rect">
@@ -5395,20 +5581,20 @@
                 </a:solidFill>
                 <a:latin typeface="Arial"/>
               </a:rPr>
-              <a:t>Nothing here is enhanced and nothing is labelled. The rectangle in the cart's down camera is a fixed work-zone overlay: it sits at the same pixels on frames with no vegetation in them at all.</a:t>
-            </a:r>
-          </a:p>
-        </p:txBody>
-      </p:sp>
-      <p:sp>
-        <p:nvSpPr>
-          <p:cNvPr id="58" name="TextBox 57"/>
+              <a:t>A language model decides what the collector goes after next, judges whether a candidate dataset is on topic, and reviews a finished step. Those run on the cluster, as batch jobs, on open weights. The lab box hosts only the small guide model, and a verdict produced there is marked in its own record as a draft that may not be reported.</a:t>
+            </a:r>
+          </a:p>
+        </p:txBody>
+      </p:sp>
+      <p:sp>
+        <p:nvSpPr>
+          <p:cNvPr id="62" name="TextBox 61"/>
           <p:cNvSpPr txBox="1"/>
           <p:nvPr/>
         </p:nvSpPr>
         <p:spPr>
           <a:xfrm>
-            <a:off x="32552640" y="18735802"/>
+            <a:off x="32552640" y="23783290"/>
             <a:ext cx="10607040" cy="365760"/>
           </a:xfrm>
           <a:prstGeom prst="rect">
@@ -5437,20 +5623,20 @@
                 </a:solidFill>
                 <a:latin typeface="Georgia"/>
               </a:rPr>
-              <a:t>Only one robot has the button</a:t>
-            </a:r>
-          </a:p>
-        </p:txBody>
-      </p:sp>
-      <p:sp>
-        <p:nvSpPr>
-          <p:cNvPr id="59" name="Rectangle 58"/>
+              <a:t>Any research field is a project</a:t>
+            </a:r>
+          </a:p>
+        </p:txBody>
+      </p:sp>
+      <p:sp>
+        <p:nvSpPr>
+          <p:cNvPr id="63" name="Rectangle 62"/>
           <p:cNvSpPr/>
           <p:nvPr/>
         </p:nvSpPr>
         <p:spPr>
           <a:xfrm>
-            <a:off x="32552640" y="19264122"/>
+            <a:off x="32552640" y="24311610"/>
             <a:ext cx="10607040" cy="27432"/>
           </a:xfrm>
           <a:prstGeom prst="rect">
@@ -5488,13 +5674,13 @@
       </p:sp>
       <p:sp>
         <p:nvSpPr>
-          <p:cNvPr id="60" name="TextBox 59"/>
+          <p:cNvPr id="64" name="TextBox 63"/>
           <p:cNvSpPr txBox="1"/>
           <p:nvPr/>
         </p:nvSpPr>
         <p:spPr>
           <a:xfrm>
-            <a:off x="32552640" y="19593306"/>
+            <a:off x="32552640" y="24640794"/>
             <a:ext cx="10607040" cy="365760"/>
           </a:xfrm>
           <a:prstGeom prst="rect">
@@ -5523,69 +5709,27 @@
                 </a:solidFill>
                 <a:latin typeface="Arial"/>
               </a:rPr>
-              <a:t>The Drive button appears on the 241 project and not on the laser cart's, because the allow-list holds one target. The rover has been dark since 2026-08-28: the platform answers a drive request today with its own offline page. The cart has never been drivable from the platform.</a:t>
-            </a:r>
-          </a:p>
-        </p:txBody>
-      </p:sp>
-      <p:sp>
-        <p:nvSpPr>
-          <p:cNvPr id="61" name="TextBox 60"/>
-          <p:cNvSpPr txBox="1"/>
-          <p:nvPr/>
-        </p:nvSpPr>
-        <p:spPr>
-          <a:xfrm>
-            <a:off x="32552640" y="21259546"/>
-            <a:ext cx="10607040" cy="365760"/>
-          </a:xfrm>
-          <a:prstGeom prst="rect">
-            <a:avLst/>
-          </a:prstGeom>
-          <a:noFill/>
-        </p:spPr>
-        <p:txBody>
-          <a:bodyPr wrap="square" lIns="0" rIns="0" tIns="0" bIns="0">
-            <a:spAutoFit/>
-          </a:bodyPr>
-          <a:lstStyle/>
-          <a:p>
-            <a:pPr algn="l">
-              <a:lnSpc>
-                <a:spcPct val="95000"/>
-              </a:lnSpc>
-              <a:spcAft>
-                <a:spcPts val="0"/>
-              </a:spcAft>
-            </a:pPr>
-            <a:r>
-              <a:rPr sz="3200" b="1">
-                <a:solidFill>
-                  <a:srgbClr val="2B2A26"/>
-                </a:solidFill>
-                <a:latin typeface="Georgia"/>
-              </a:rPr>
-              <a:t>Which decisions a model makes</a:t>
-            </a:r>
-          </a:p>
-        </p:txBody>
-      </p:sp>
-      <p:sp>
-        <p:nvSpPr>
-          <p:cNvPr id="62" name="Rectangle 61"/>
+              <a:t>A lab member opens a project for any data type and any field, uploads images, video or sensor logs, and gets an automatic diagnosis before choosing what to do next. Weed detection is one project on this platform. The 241 rover, the laser cart and a Unitree humanoid each have their own.</a:t>
+            </a:r>
+          </a:p>
+        </p:txBody>
+      </p:sp>
+      <p:sp>
+        <p:nvSpPr>
+          <p:cNvPr id="65" name="Rectangle 64"/>
           <p:cNvSpPr/>
           <p:nvPr/>
         </p:nvSpPr>
         <p:spPr>
           <a:xfrm>
-            <a:off x="32552640" y="21787866"/>
-            <a:ext cx="10607040" cy="27432"/>
+            <a:off x="731520" y="30632400"/>
+            <a:ext cx="42428160" cy="20116"/>
           </a:xfrm>
           <a:prstGeom prst="rect">
             <a:avLst/>
           </a:prstGeom>
           <a:solidFill>
-            <a:srgbClr val="8A4B1E"/>
+            <a:srgbClr val="D8D0BF"/>
           </a:solidFill>
           <a:ln>
             <a:noFill/>
@@ -5616,221 +5760,7 @@
       </p:sp>
       <p:sp>
         <p:nvSpPr>
-          <p:cNvPr id="63" name="TextBox 62"/>
-          <p:cNvSpPr txBox="1"/>
-          <p:nvPr/>
-        </p:nvSpPr>
-        <p:spPr>
-          <a:xfrm>
-            <a:off x="32552640" y="22117050"/>
-            <a:ext cx="10607040" cy="365760"/>
-          </a:xfrm>
-          <a:prstGeom prst="rect">
-            <a:avLst/>
-          </a:prstGeom>
-          <a:noFill/>
-        </p:spPr>
-        <p:txBody>
-          <a:bodyPr wrap="square" lIns="0" rIns="0" tIns="0" bIns="0">
-            <a:spAutoFit/>
-          </a:bodyPr>
-          <a:lstStyle/>
-          <a:p>
-            <a:pPr algn="l">
-              <a:lnSpc>
-                <a:spcPct val="122000"/>
-              </a:lnSpc>
-              <a:spcAft>
-                <a:spcPts val="1400"/>
-              </a:spcAft>
-            </a:pPr>
-            <a:r>
-              <a:rPr sz="1900" b="0">
-                <a:solidFill>
-                  <a:srgbClr val="2B2A26"/>
-                </a:solidFill>
-                <a:latin typeface="Arial"/>
-              </a:rPr>
-              <a:t>A language model decides what the collector goes after next, judges whether a candidate dataset is on topic, and reviews a finished step. Those run on the cluster, as batch jobs, on open weights. The lab box hosts only the small guide model, and a verdict produced there is marked in its own record as a draft that may not be reported.</a:t>
-            </a:r>
-          </a:p>
-        </p:txBody>
-      </p:sp>
-      <p:sp>
-        <p:nvSpPr>
-          <p:cNvPr id="64" name="TextBox 63"/>
-          <p:cNvSpPr txBox="1"/>
-          <p:nvPr/>
-        </p:nvSpPr>
-        <p:spPr>
-          <a:xfrm>
-            <a:off x="32552640" y="23783290"/>
-            <a:ext cx="10607040" cy="365760"/>
-          </a:xfrm>
-          <a:prstGeom prst="rect">
-            <a:avLst/>
-          </a:prstGeom>
-          <a:noFill/>
-        </p:spPr>
-        <p:txBody>
-          <a:bodyPr wrap="square" lIns="0" rIns="0" tIns="0" bIns="0">
-            <a:spAutoFit/>
-          </a:bodyPr>
-          <a:lstStyle/>
-          <a:p>
-            <a:pPr algn="l">
-              <a:lnSpc>
-                <a:spcPct val="95000"/>
-              </a:lnSpc>
-              <a:spcAft>
-                <a:spcPts val="0"/>
-              </a:spcAft>
-            </a:pPr>
-            <a:r>
-              <a:rPr sz="3200" b="1">
-                <a:solidFill>
-                  <a:srgbClr val="2B2A26"/>
-                </a:solidFill>
-                <a:latin typeface="Georgia"/>
-              </a:rPr>
-              <a:t>Any research field is a project</a:t>
-            </a:r>
-          </a:p>
-        </p:txBody>
-      </p:sp>
-      <p:sp>
-        <p:nvSpPr>
-          <p:cNvPr id="65" name="Rectangle 64"/>
-          <p:cNvSpPr/>
-          <p:nvPr/>
-        </p:nvSpPr>
-        <p:spPr>
-          <a:xfrm>
-            <a:off x="32552640" y="24311610"/>
-            <a:ext cx="10607040" cy="27432"/>
-          </a:xfrm>
-          <a:prstGeom prst="rect">
-            <a:avLst/>
-          </a:prstGeom>
-          <a:solidFill>
-            <a:srgbClr val="8A4B1E"/>
-          </a:solidFill>
-          <a:ln>
-            <a:noFill/>
-          </a:ln>
-          <a:effectLst/>
-        </p:spPr>
-        <p:style>
-          <a:lnRef idx="1">
-            <a:schemeClr val="accent1"/>
-          </a:lnRef>
-          <a:fillRef idx="3">
-            <a:schemeClr val="accent1"/>
-          </a:fillRef>
-          <a:effectRef idx="2">
-            <a:schemeClr val="accent1"/>
-          </a:effectRef>
-          <a:fontRef idx="minor">
-            <a:schemeClr val="lt1"/>
-          </a:fontRef>
-        </p:style>
-        <p:txBody>
-          <a:bodyPr rtlCol="0" anchor="ctr"/>
-          <a:lstStyle/>
-          <a:p>
-            <a:pPr algn="ctr"/>
-          </a:p>
-        </p:txBody>
-      </p:sp>
-      <p:sp>
-        <p:nvSpPr>
           <p:cNvPr id="66" name="TextBox 65"/>
-          <p:cNvSpPr txBox="1"/>
-          <p:nvPr/>
-        </p:nvSpPr>
-        <p:spPr>
-          <a:xfrm>
-            <a:off x="32552640" y="24640794"/>
-            <a:ext cx="10607040" cy="365760"/>
-          </a:xfrm>
-          <a:prstGeom prst="rect">
-            <a:avLst/>
-          </a:prstGeom>
-          <a:noFill/>
-        </p:spPr>
-        <p:txBody>
-          <a:bodyPr wrap="square" lIns="0" rIns="0" tIns="0" bIns="0">
-            <a:spAutoFit/>
-          </a:bodyPr>
-          <a:lstStyle/>
-          <a:p>
-            <a:pPr algn="l">
-              <a:lnSpc>
-                <a:spcPct val="122000"/>
-              </a:lnSpc>
-              <a:spcAft>
-                <a:spcPts val="1400"/>
-              </a:spcAft>
-            </a:pPr>
-            <a:r>
-              <a:rPr sz="1900" b="0">
-                <a:solidFill>
-                  <a:srgbClr val="2B2A26"/>
-                </a:solidFill>
-                <a:latin typeface="Arial"/>
-              </a:rPr>
-              <a:t>A lab member opens a project for any data type and any field, uploads images, video or sensor logs, and gets an automatic diagnosis before choosing what to do next. Weed detection is one project on this platform. The 241 rover, the laser cart and a Unitree humanoid each have their own.</a:t>
-            </a:r>
-          </a:p>
-        </p:txBody>
-      </p:sp>
-      <p:sp>
-        <p:nvSpPr>
-          <p:cNvPr id="67" name="Rectangle 66"/>
-          <p:cNvSpPr/>
-          <p:nvPr/>
-        </p:nvSpPr>
-        <p:spPr>
-          <a:xfrm>
-            <a:off x="731520" y="30632400"/>
-            <a:ext cx="42428160" cy="20116"/>
-          </a:xfrm>
-          <a:prstGeom prst="rect">
-            <a:avLst/>
-          </a:prstGeom>
-          <a:solidFill>
-            <a:srgbClr val="D8D0BF"/>
-          </a:solidFill>
-          <a:ln>
-            <a:noFill/>
-          </a:ln>
-          <a:effectLst/>
-        </p:spPr>
-        <p:style>
-          <a:lnRef idx="1">
-            <a:schemeClr val="accent1"/>
-          </a:lnRef>
-          <a:fillRef idx="3">
-            <a:schemeClr val="accent1"/>
-          </a:fillRef>
-          <a:effectRef idx="2">
-            <a:schemeClr val="accent1"/>
-          </a:effectRef>
-          <a:fontRef idx="minor">
-            <a:schemeClr val="lt1"/>
-          </a:fontRef>
-        </p:style>
-        <p:txBody>
-          <a:bodyPr rtlCol="0" anchor="ctr"/>
-          <a:lstStyle/>
-          <a:p>
-            <a:pPr algn="ctr"/>
-          </a:p>
-        </p:txBody>
-      </p:sp>
-      <p:sp>
-        <p:nvSpPr>
-          <p:cNvPr id="68" name="TextBox 67"/>
           <p:cNvSpPr txBox="1"/>
           <p:nvPr/>
         </p:nvSpPr>
@@ -5872,7 +5802,7 @@
       </p:sp>
       <p:sp>
         <p:nvSpPr>
-          <p:cNvPr id="69" name="TextBox 68"/>
+          <p:cNvPr id="67" name="TextBox 66"/>
           <p:cNvSpPr txBox="1"/>
           <p:nvPr/>
         </p:nvSpPr>
@@ -5914,7 +5844,7 @@
       </p:sp>
       <p:sp>
         <p:nvSpPr>
-          <p:cNvPr id="70" name="TextBox 69"/>
+          <p:cNvPr id="68" name="TextBox 67"/>
           <p:cNvSpPr txBox="1"/>
           <p:nvPr/>
         </p:nvSpPr>
